--- a/public/fun/cards/office/office-41.pptx
+++ b/public/fun/cards/office/office-41.pptx
@@ -3085,7 +3085,7 @@
     <p:bg>
       <p:bgPr>
         <a:solidFill>
-          <a:srgbClr val="FBF8F2"/>
+          <a:srgbClr val="F3F4F6"/>
         </a:solidFill>
         <a:effectLst/>
       </p:bgPr>
@@ -3099,20 +3099,107 @@
       <p:grpSpPr/>
       <p:sp>
         <p:nvSpPr>
-          <p:cNvPr id="2" name="Rectangle 1"/>
+          <p:cNvPr id="2" name="Freeform 1"/>
           <p:cNvSpPr/>
           <p:nvPr/>
         </p:nvSpPr>
         <p:spPr>
           <a:xfrm>
-            <a:off x="0" y="0"/>
-            <a:ext cx="165600" cy="1800000"/>
+            <a:off x="2268000" y="0"/>
+            <a:ext cx="972000" cy="972000"/>
           </a:xfrm>
-          <a:prstGeom prst="rect">
+          <a:custGeom>
             <a:avLst/>
-          </a:prstGeom>
+            <a:gdLst/>
+            <a:ahLst/>
+            <a:cxnLst/>
+            <a:rect l="l" t="t" r="r" b="b"/>
+            <a:pathLst>
+              <a:path w="972000" h="972000">
+                <a:moveTo>
+                  <a:pt x="972000" y="0"/>
+                </a:moveTo>
+                <a:lnTo>
+                  <a:pt x="972000" y="972000"/>
+                </a:lnTo>
+                <a:lnTo>
+                  <a:pt x="908428" y="969919"/>
+                </a:lnTo>
+                <a:lnTo>
+                  <a:pt x="845129" y="963684"/>
+                </a:lnTo>
+                <a:lnTo>
+                  <a:pt x="782372" y="953323"/>
+                </a:lnTo>
+                <a:lnTo>
+                  <a:pt x="720428" y="938880"/>
+                </a:lnTo>
+                <a:lnTo>
+                  <a:pt x="659561" y="920416"/>
+                </a:lnTo>
+                <a:lnTo>
+                  <a:pt x="600032" y="898011"/>
+                </a:lnTo>
+                <a:lnTo>
+                  <a:pt x="542095" y="871760"/>
+                </a:lnTo>
+                <a:lnTo>
+                  <a:pt x="486000" y="841777"/>
+                </a:lnTo>
+                <a:lnTo>
+                  <a:pt x="431986" y="808188"/>
+                </a:lnTo>
+                <a:lnTo>
+                  <a:pt x="380284" y="771139"/>
+                </a:lnTo>
+                <a:lnTo>
+                  <a:pt x="331116" y="730788"/>
+                </a:lnTo>
+                <a:lnTo>
+                  <a:pt x="284692" y="687308"/>
+                </a:lnTo>
+                <a:lnTo>
+                  <a:pt x="241212" y="640884"/>
+                </a:lnTo>
+                <a:lnTo>
+                  <a:pt x="200861" y="591716"/>
+                </a:lnTo>
+                <a:lnTo>
+                  <a:pt x="163812" y="540014"/>
+                </a:lnTo>
+                <a:lnTo>
+                  <a:pt x="130223" y="486000"/>
+                </a:lnTo>
+                <a:lnTo>
+                  <a:pt x="100240" y="429905"/>
+                </a:lnTo>
+                <a:lnTo>
+                  <a:pt x="73989" y="371968"/>
+                </a:lnTo>
+                <a:lnTo>
+                  <a:pt x="51584" y="312439"/>
+                </a:lnTo>
+                <a:lnTo>
+                  <a:pt x="33120" y="251572"/>
+                </a:lnTo>
+                <a:lnTo>
+                  <a:pt x="18677" y="189628"/>
+                </a:lnTo>
+                <a:lnTo>
+                  <a:pt x="8316" y="126871"/>
+                </a:lnTo>
+                <a:lnTo>
+                  <a:pt x="2081" y="63572"/>
+                </a:lnTo>
+                <a:lnTo>
+                  <a:pt x="0" y="0"/>
+                </a:lnTo>
+                <a:close/>
+              </a:path>
+            </a:pathLst>
+          </a:custGeom>
           <a:solidFill>
-            <a:srgbClr val="3B917D"/>
+            <a:srgbClr val="9B7BFF"/>
           </a:solidFill>
           <a:ln>
             <a:noFill/>
@@ -3128,20 +3215,107 @@
       </p:sp>
       <p:sp>
         <p:nvSpPr>
-          <p:cNvPr id="3" name="Rectangle 2"/>
+          <p:cNvPr id="3" name="Freeform 2"/>
           <p:cNvSpPr/>
           <p:nvPr/>
         </p:nvSpPr>
         <p:spPr>
           <a:xfrm>
-            <a:off x="165600" y="0"/>
-            <a:ext cx="36000" cy="1800000"/>
+            <a:off x="2664000" y="0"/>
+            <a:ext cx="576000" cy="576000"/>
           </a:xfrm>
-          <a:prstGeom prst="rect">
+          <a:custGeom>
             <a:avLst/>
-          </a:prstGeom>
+            <a:gdLst/>
+            <a:ahLst/>
+            <a:cxnLst/>
+            <a:rect l="l" t="t" r="r" b="b"/>
+            <a:pathLst>
+              <a:path w="576000" h="576000">
+                <a:moveTo>
+                  <a:pt x="576000" y="0"/>
+                </a:moveTo>
+                <a:lnTo>
+                  <a:pt x="576000" y="576000"/>
+                </a:lnTo>
+                <a:lnTo>
+                  <a:pt x="538328" y="574767"/>
+                </a:lnTo>
+                <a:lnTo>
+                  <a:pt x="500817" y="571072"/>
+                </a:lnTo>
+                <a:lnTo>
+                  <a:pt x="463628" y="564932"/>
+                </a:lnTo>
+                <a:lnTo>
+                  <a:pt x="426920" y="556373"/>
+                </a:lnTo>
+                <a:lnTo>
+                  <a:pt x="390851" y="545432"/>
+                </a:lnTo>
+                <a:lnTo>
+                  <a:pt x="355574" y="532155"/>
+                </a:lnTo>
+                <a:lnTo>
+                  <a:pt x="321242" y="516599"/>
+                </a:lnTo>
+                <a:lnTo>
+                  <a:pt x="288000" y="498831"/>
+                </a:lnTo>
+                <a:lnTo>
+                  <a:pt x="255992" y="478926"/>
+                </a:lnTo>
+                <a:lnTo>
+                  <a:pt x="225353" y="456972"/>
+                </a:lnTo>
+                <a:lnTo>
+                  <a:pt x="196217" y="433060"/>
+                </a:lnTo>
+                <a:lnTo>
+                  <a:pt x="168706" y="407294"/>
+                </a:lnTo>
+                <a:lnTo>
+                  <a:pt x="142940" y="379783"/>
+                </a:lnTo>
+                <a:lnTo>
+                  <a:pt x="119028" y="350647"/>
+                </a:lnTo>
+                <a:lnTo>
+                  <a:pt x="97074" y="320008"/>
+                </a:lnTo>
+                <a:lnTo>
+                  <a:pt x="77169" y="288000"/>
+                </a:lnTo>
+                <a:lnTo>
+                  <a:pt x="59401" y="254758"/>
+                </a:lnTo>
+                <a:lnTo>
+                  <a:pt x="43845" y="220426"/>
+                </a:lnTo>
+                <a:lnTo>
+                  <a:pt x="30568" y="185149"/>
+                </a:lnTo>
+                <a:lnTo>
+                  <a:pt x="19627" y="149080"/>
+                </a:lnTo>
+                <a:lnTo>
+                  <a:pt x="11068" y="112372"/>
+                </a:lnTo>
+                <a:lnTo>
+                  <a:pt x="4928" y="75183"/>
+                </a:lnTo>
+                <a:lnTo>
+                  <a:pt x="1233" y="37672"/>
+                </a:lnTo>
+                <a:lnTo>
+                  <a:pt x="0" y="0"/>
+                </a:lnTo>
+                <a:close/>
+              </a:path>
+            </a:pathLst>
+          </a:custGeom>
           <a:solidFill>
-            <a:srgbClr val="C8E0DB"/>
+            <a:srgbClr val="E7E3F7"/>
           </a:solidFill>
           <a:ln>
             <a:noFill/>
@@ -3157,128 +3331,14 @@
       </p:sp>
       <p:sp>
         <p:nvSpPr>
-          <p:cNvPr id="4" name="Rounded Rectangle 3"/>
-          <p:cNvSpPr/>
+          <p:cNvPr id="4" name="텍스트"/>
+          <p:cNvSpPr txBox="1"/>
           <p:nvPr/>
         </p:nvSpPr>
         <p:spPr>
           <a:xfrm>
-            <a:off x="2683584" y="398736"/>
-            <a:ext cx="69120" cy="124416"/>
-          </a:xfrm>
-          <a:prstGeom prst="roundRect">
-            <a:avLst>
-              <a:gd name="adj" fmla="val 10000"/>
-            </a:avLst>
-          </a:prstGeom>
-          <a:solidFill>
-            <a:srgbClr val="3B917D"/>
-          </a:solidFill>
-          <a:ln>
-            <a:noFill/>
-          </a:ln>
-        </p:spPr>
-        <p:txBody>
-          <a:bodyPr rtlCol="0" anchor="ctr"/>
-          <a:lstStyle/>
-          <a:p>
-            <a:pPr algn="ctr"/>
-          </a:p>
-        </p:txBody>
-      </p:sp>
-      <p:sp>
-        <p:nvSpPr>
-          <p:cNvPr id="5" name="Rounded Rectangle 4"/>
-          <p:cNvSpPr/>
-          <p:nvPr/>
-        </p:nvSpPr>
-        <p:spPr>
-          <a:xfrm>
-            <a:off x="2773440" y="329616"/>
-            <a:ext cx="69120" cy="193536"/>
-          </a:xfrm>
-          <a:prstGeom prst="roundRect">
-            <a:avLst>
-              <a:gd name="adj" fmla="val 10000"/>
-            </a:avLst>
-          </a:prstGeom>
-          <a:solidFill>
-            <a:srgbClr val="C8E0DB"/>
-          </a:solidFill>
-          <a:ln>
-            <a:noFill/>
-          </a:ln>
-        </p:spPr>
-        <p:txBody>
-          <a:bodyPr rtlCol="0" anchor="ctr"/>
-          <a:lstStyle/>
-          <a:p>
-            <a:pPr algn="ctr"/>
-          </a:p>
-        </p:txBody>
-      </p:sp>
-      <p:sp>
-        <p:nvSpPr>
-          <p:cNvPr id="6" name="Rounded Rectangle 5"/>
-          <p:cNvSpPr/>
-          <p:nvPr/>
-        </p:nvSpPr>
-        <p:spPr>
-          <a:xfrm>
-            <a:off x="2863296" y="246672"/>
-            <a:ext cx="69120" cy="276480"/>
-          </a:xfrm>
-          <a:prstGeom prst="roundRect">
-            <a:avLst>
-              <a:gd name="adj" fmla="val 10000"/>
-            </a:avLst>
-          </a:prstGeom>
-          <a:solidFill>
-            <a:srgbClr val="3B917D"/>
-          </a:solidFill>
-          <a:ln>
-            <a:noFill/>
-          </a:ln>
-        </p:spPr>
-        <p:txBody>
-          <a:bodyPr rtlCol="0" anchor="ctr"/>
-          <a:lstStyle/>
-          <a:p>
-            <a:pPr algn="ctr"/>
-          </a:p>
-        </p:txBody>
-      </p:sp>
-      <p:cxnSp>
-        <p:nvCxnSpPr>
-          <p:cNvPr id="7" name="Connector 6"/>
-          <p:cNvCxnSpPr/>
-          <p:nvPr/>
-        </p:nvCxnSpPr>
-        <p:spPr>
-          <a:xfrm>
-            <a:off x="2655936" y="536976"/>
-            <a:ext cx="304128" cy="0"/>
-          </a:xfrm>
-          <a:prstGeom prst="line">
-            <a:avLst/>
-          </a:prstGeom>
-          <a:ln w="13824">
-            <a:solidFill>
-              <a:srgbClr val="C8E0DB"/>
-            </a:solidFill>
-          </a:ln>
-        </p:spPr>
-      </p:cxnSp>
-      <p:sp>
-        <p:nvSpPr>
-          <p:cNvPr id="8" name="텍스트"/>
-          <p:cNvSpPr txBox="1"/>
-          <p:nvPr/>
-        </p:nvSpPr>
-        <p:spPr>
-          <a:xfrm>
-            <a:off x="396000" y="223200"/>
-            <a:ext cx="2016000" cy="108000"/>
+            <a:off x="252000" y="540000"/>
+            <a:ext cx="1944000" cy="360000"/>
           </a:xfrm>
           <a:prstGeom prst="rect">
             <a:avLst/>
@@ -3293,32 +3353,32 @@
           <a:p>
             <a:pPr algn="l">
               <a:lnSpc>
-                <a:spcPts val="1087"/>
+                <a:spcPts val="3190"/>
               </a:lnSpc>
             </a:pPr>
             <a:r>
-              <a:rPr sz="750" b="1" spc="150">
+              <a:rPr sz="2200" b="1">
                 <a:solidFill>
-                  <a:srgbClr val="7E6C64"/>
+                  <a:srgbClr val="12151C"/>
                 </a:solidFill>
                 <a:latin typeface="맑은 고딕"/>
                 <a:ea typeface="맑은 고딕"/>
               </a:rPr>
-              <a:t>회사명 · 부서명</a:t>
-            </a:r>
-          </a:p>
-        </p:txBody>
-      </p:sp>
-      <p:sp>
-        <p:nvSpPr>
-          <p:cNvPr id="9" name="텍스트"/>
+              <a:t>나윤서</a:t>
+            </a:r>
+          </a:p>
+        </p:txBody>
+      </p:sp>
+      <p:sp>
+        <p:nvSpPr>
+          <p:cNvPr id="5" name="텍스트"/>
           <p:cNvSpPr txBox="1"/>
           <p:nvPr/>
         </p:nvSpPr>
         <p:spPr>
           <a:xfrm>
-            <a:off x="396000" y="540000"/>
-            <a:ext cx="2160000" cy="313692"/>
+            <a:off x="252000" y="943200"/>
+            <a:ext cx="1944000" cy="171451"/>
           </a:xfrm>
           <a:prstGeom prst="rect">
             <a:avLst/>
@@ -3333,32 +3393,32 @@
           <a:p>
             <a:pPr algn="l">
               <a:lnSpc>
-                <a:spcPts val="2755"/>
+                <a:spcPts val="1305"/>
               </a:lnSpc>
             </a:pPr>
             <a:r>
-              <a:rPr sz="1900" b="1" spc="50">
+              <a:rPr sz="900" b="0">
                 <a:solidFill>
-                  <a:srgbClr val="3B2017"/>
+                  <a:srgbClr val="6B7280"/>
                 </a:solidFill>
                 <a:latin typeface="맑은 고딕"/>
                 <a:ea typeface="맑은 고딕"/>
               </a:rPr>
-              <a:t>나윤서</a:t>
-            </a:r>
-          </a:p>
-        </p:txBody>
-      </p:sp>
-      <p:sp>
-        <p:nvSpPr>
-          <p:cNvPr id="10" name="텍스트"/>
+              <a:t>영업팀 대리</a:t>
+            </a:r>
+          </a:p>
+        </p:txBody>
+      </p:sp>
+      <p:sp>
+        <p:nvSpPr>
+          <p:cNvPr id="6" name="텍스트"/>
           <p:cNvSpPr txBox="1"/>
           <p:nvPr/>
         </p:nvSpPr>
         <p:spPr>
           <a:xfrm>
-            <a:off x="396000" y="835200"/>
-            <a:ext cx="2160000" cy="129600"/>
+            <a:off x="252000" y="223200"/>
+            <a:ext cx="1440000" cy="133351"/>
           </a:xfrm>
           <a:prstGeom prst="rect">
             <a:avLst/>
@@ -3373,61 +3433,32 @@
           <a:p>
             <a:pPr algn="l">
               <a:lnSpc>
-                <a:spcPts val="1232"/>
+                <a:spcPts val="1015"/>
               </a:lnSpc>
             </a:pPr>
             <a:r>
-              <a:rPr sz="850" b="1">
+              <a:rPr sz="700" b="1" spc="200">
                 <a:solidFill>
-                  <a:srgbClr val="327B6A"/>
+                  <a:srgbClr val="6B7280"/>
                 </a:solidFill>
                 <a:latin typeface="맑은 고딕"/>
                 <a:ea typeface="맑은 고딕"/>
               </a:rPr>
-              <a:t>영업팀 대리</a:t>
-            </a:r>
-          </a:p>
-        </p:txBody>
-      </p:sp>
-      <p:sp>
-        <p:nvSpPr>
-          <p:cNvPr id="11" name="Rectangle 10"/>
-          <p:cNvSpPr/>
+              <a:t>회사명 · 부서명</a:t>
+            </a:r>
+          </a:p>
+        </p:txBody>
+      </p:sp>
+      <p:sp>
+        <p:nvSpPr>
+          <p:cNvPr id="7" name="텍스트"/>
+          <p:cNvSpPr txBox="1"/>
           <p:nvPr/>
         </p:nvSpPr>
         <p:spPr>
           <a:xfrm>
-            <a:off x="396000" y="1051200"/>
-            <a:ext cx="230400" cy="14400"/>
-          </a:xfrm>
-          <a:prstGeom prst="rect">
-            <a:avLst/>
-          </a:prstGeom>
-          <a:solidFill>
-            <a:srgbClr val="3B917D"/>
-          </a:solidFill>
-          <a:ln>
-            <a:noFill/>
-          </a:ln>
-        </p:spPr>
-        <p:txBody>
-          <a:bodyPr rtlCol="0" anchor="ctr"/>
-          <a:lstStyle/>
-          <a:p>
-            <a:pPr algn="ctr"/>
-          </a:p>
-        </p:txBody>
-      </p:sp>
-      <p:sp>
-        <p:nvSpPr>
-          <p:cNvPr id="12" name="텍스트"/>
-          <p:cNvSpPr txBox="1"/>
-          <p:nvPr/>
-        </p:nvSpPr>
-        <p:spPr>
-          <a:xfrm>
-            <a:off x="396000" y="1188000"/>
-            <a:ext cx="122400" cy="168911"/>
+            <a:off x="252000" y="1234800"/>
+            <a:ext cx="331200" cy="99061"/>
           </a:xfrm>
           <a:prstGeom prst="rect">
             <a:avLst/>
@@ -3442,32 +3473,32 @@
           <a:p>
             <a:pPr algn="l">
               <a:lnSpc>
-                <a:spcPts val="1015"/>
+                <a:spcPts val="754"/>
               </a:lnSpc>
             </a:pPr>
             <a:r>
-              <a:rPr sz="700" b="1">
+              <a:rPr sz="520" b="1" spc="120">
                 <a:solidFill>
-                  <a:srgbClr val="327B6A"/>
+                  <a:srgbClr val="6B7280"/>
                 </a:solidFill>
                 <a:latin typeface="맑은 고딕"/>
                 <a:ea typeface="맑은 고딕"/>
               </a:rPr>
-              <a:t>T</a:t>
-            </a:r>
-          </a:p>
-        </p:txBody>
-      </p:sp>
-      <p:sp>
-        <p:nvSpPr>
-          <p:cNvPr id="13" name="텍스트"/>
+              <a:t>TEL</a:t>
+            </a:r>
+          </a:p>
+        </p:txBody>
+      </p:sp>
+      <p:sp>
+        <p:nvSpPr>
+          <p:cNvPr id="8" name="텍스트"/>
           <p:cNvSpPr txBox="1"/>
           <p:nvPr/>
         </p:nvSpPr>
         <p:spPr>
           <a:xfrm>
-            <a:off x="540000" y="1188000"/>
-            <a:ext cx="1872000" cy="168911"/>
+            <a:off x="583200" y="1224000"/>
+            <a:ext cx="1512000" cy="133351"/>
           </a:xfrm>
           <a:prstGeom prst="rect">
             <a:avLst/>
@@ -3488,7 +3519,7 @@
             <a:r>
               <a:rPr sz="700" b="0">
                 <a:solidFill>
-                  <a:srgbClr val="3B2017"/>
+                  <a:srgbClr val="12151C"/>
                 </a:solidFill>
                 <a:latin typeface="맑은 고딕"/>
                 <a:ea typeface="맑은 고딕"/>
@@ -3500,14 +3531,14 @@
       </p:sp>
       <p:sp>
         <p:nvSpPr>
-          <p:cNvPr id="14" name="텍스트"/>
+          <p:cNvPr id="9" name="텍스트"/>
           <p:cNvSpPr txBox="1"/>
           <p:nvPr/>
         </p:nvSpPr>
         <p:spPr>
           <a:xfrm>
-            <a:off x="396000" y="1356911"/>
-            <a:ext cx="122400" cy="168911"/>
+            <a:off x="252000" y="1371600"/>
+            <a:ext cx="331200" cy="99061"/>
           </a:xfrm>
           <a:prstGeom prst="rect">
             <a:avLst/>
@@ -3522,32 +3553,32 @@
           <a:p>
             <a:pPr algn="l">
               <a:lnSpc>
-                <a:spcPts val="1015"/>
+                <a:spcPts val="754"/>
               </a:lnSpc>
             </a:pPr>
             <a:r>
-              <a:rPr sz="700" b="1">
+              <a:rPr sz="520" b="1" spc="120">
                 <a:solidFill>
-                  <a:srgbClr val="327B6A"/>
+                  <a:srgbClr val="6B7280"/>
                 </a:solidFill>
                 <a:latin typeface="맑은 고딕"/>
                 <a:ea typeface="맑은 고딕"/>
               </a:rPr>
-              <a:t>E</a:t>
-            </a:r>
-          </a:p>
-        </p:txBody>
-      </p:sp>
-      <p:sp>
-        <p:nvSpPr>
-          <p:cNvPr id="15" name="텍스트"/>
+              <a:t>MAIL</a:t>
+            </a:r>
+          </a:p>
+        </p:txBody>
+      </p:sp>
+      <p:sp>
+        <p:nvSpPr>
+          <p:cNvPr id="10" name="텍스트"/>
           <p:cNvSpPr txBox="1"/>
           <p:nvPr/>
         </p:nvSpPr>
         <p:spPr>
           <a:xfrm>
-            <a:off x="540000" y="1356911"/>
-            <a:ext cx="1872000" cy="168911"/>
+            <a:off x="583200" y="1360800"/>
+            <a:ext cx="1512000" cy="133351"/>
           </a:xfrm>
           <a:prstGeom prst="rect">
             <a:avLst/>
@@ -3568,7 +3599,7 @@
             <a:r>
               <a:rPr sz="700" b="0">
                 <a:solidFill>
-                  <a:srgbClr val="3B2017"/>
+                  <a:srgbClr val="12151C"/>
                 </a:solidFill>
                 <a:latin typeface="맑은 고딕"/>
                 <a:ea typeface="맑은 고딕"/>
@@ -3580,14 +3611,14 @@
       </p:sp>
       <p:sp>
         <p:nvSpPr>
-          <p:cNvPr id="16" name="텍스트"/>
+          <p:cNvPr id="11" name="텍스트"/>
           <p:cNvSpPr txBox="1"/>
           <p:nvPr/>
         </p:nvSpPr>
         <p:spPr>
           <a:xfrm>
-            <a:off x="396000" y="1525822"/>
-            <a:ext cx="122400" cy="168911"/>
+            <a:off x="252000" y="1508400"/>
+            <a:ext cx="331200" cy="99061"/>
           </a:xfrm>
           <a:prstGeom prst="rect">
             <a:avLst/>
@@ -3602,32 +3633,32 @@
           <a:p>
             <a:pPr algn="l">
               <a:lnSpc>
-                <a:spcPts val="1015"/>
+                <a:spcPts val="754"/>
               </a:lnSpc>
             </a:pPr>
             <a:r>
-              <a:rPr sz="700" b="1">
+              <a:rPr sz="520" b="1" spc="120">
                 <a:solidFill>
-                  <a:srgbClr val="327B6A"/>
+                  <a:srgbClr val="6B7280"/>
                 </a:solidFill>
                 <a:latin typeface="맑은 고딕"/>
                 <a:ea typeface="맑은 고딕"/>
               </a:rPr>
-              <a:t>A</a:t>
-            </a:r>
-          </a:p>
-        </p:txBody>
-      </p:sp>
-      <p:sp>
-        <p:nvSpPr>
-          <p:cNvPr id="17" name="텍스트"/>
+              <a:t>ADDR</a:t>
+            </a:r>
+          </a:p>
+        </p:txBody>
+      </p:sp>
+      <p:sp>
+        <p:nvSpPr>
+          <p:cNvPr id="12" name="텍스트"/>
           <p:cNvSpPr txBox="1"/>
           <p:nvPr/>
         </p:nvSpPr>
         <p:spPr>
           <a:xfrm>
-            <a:off x="540000" y="1525822"/>
-            <a:ext cx="1872000" cy="168911"/>
+            <a:off x="583200" y="1497600"/>
+            <a:ext cx="1512000" cy="133351"/>
           </a:xfrm>
           <a:prstGeom prst="rect">
             <a:avLst/>
@@ -3648,7 +3679,7 @@
             <a:r>
               <a:rPr sz="700" b="0">
                 <a:solidFill>
-                  <a:srgbClr val="3B2017"/>
+                  <a:srgbClr val="12151C"/>
                 </a:solidFill>
                 <a:latin typeface="맑은 고딕"/>
                 <a:ea typeface="맑은 고딕"/>
@@ -3672,7 +3703,7 @@
     <p:bg>
       <p:bgPr>
         <a:solidFill>
-          <a:srgbClr val="F9F3F0"/>
+          <a:srgbClr val="F5F2FF"/>
         </a:solidFill>
         <a:effectLst/>
       </p:bgPr>
@@ -3699,7 +3730,7 @@
             <a:avLst/>
           </a:prstGeom>
           <a:solidFill>
-            <a:srgbClr val="7D4531"/>
+            <a:srgbClr val="9B7BFF"/>
           </a:solidFill>
           <a:ln>
             <a:noFill/>
@@ -3715,22 +3746,107 @@
       </p:sp>
       <p:sp>
         <p:nvSpPr>
-          <p:cNvPr id="3" name="Rounded Rectangle 2"/>
+          <p:cNvPr id="3" name="Freeform 2"/>
           <p:cNvSpPr/>
           <p:nvPr/>
         </p:nvSpPr>
         <p:spPr>
           <a:xfrm>
-            <a:off x="1490400" y="561600"/>
-            <a:ext cx="72000" cy="129600"/>
+            <a:off x="2412000" y="972000"/>
+            <a:ext cx="828000" cy="828000"/>
           </a:xfrm>
-          <a:prstGeom prst="roundRect">
-            <a:avLst>
-              <a:gd name="adj" fmla="val 10000"/>
-            </a:avLst>
-          </a:prstGeom>
+          <a:custGeom>
+            <a:avLst/>
+            <a:gdLst/>
+            <a:ahLst/>
+            <a:cxnLst/>
+            <a:rect l="l" t="t" r="r" b="b"/>
+            <a:pathLst>
+              <a:path w="828000" h="828000">
+                <a:moveTo>
+                  <a:pt x="828000" y="828000"/>
+                </a:moveTo>
+                <a:lnTo>
+                  <a:pt x="0" y="828000"/>
+                </a:lnTo>
+                <a:lnTo>
+                  <a:pt x="1773" y="773846"/>
+                </a:lnTo>
+                <a:lnTo>
+                  <a:pt x="7084" y="719924"/>
+                </a:lnTo>
+                <a:lnTo>
+                  <a:pt x="15910" y="666465"/>
+                </a:lnTo>
+                <a:lnTo>
+                  <a:pt x="28213" y="613698"/>
+                </a:lnTo>
+                <a:lnTo>
+                  <a:pt x="43942" y="561848"/>
+                </a:lnTo>
+                <a:lnTo>
+                  <a:pt x="63028" y="511138"/>
+                </a:lnTo>
+                <a:lnTo>
+                  <a:pt x="85389" y="461785"/>
+                </a:lnTo>
+                <a:lnTo>
+                  <a:pt x="110931" y="414000"/>
+                </a:lnTo>
+                <a:lnTo>
+                  <a:pt x="139543" y="367988"/>
+                </a:lnTo>
+                <a:lnTo>
+                  <a:pt x="171103" y="323946"/>
+                </a:lnTo>
+                <a:lnTo>
+                  <a:pt x="205477" y="282062"/>
+                </a:lnTo>
+                <a:lnTo>
+                  <a:pt x="242516" y="242516"/>
+                </a:lnTo>
+                <a:lnTo>
+                  <a:pt x="282062" y="205477"/>
+                </a:lnTo>
+                <a:lnTo>
+                  <a:pt x="323946" y="171103"/>
+                </a:lnTo>
+                <a:lnTo>
+                  <a:pt x="367988" y="139543"/>
+                </a:lnTo>
+                <a:lnTo>
+                  <a:pt x="414000" y="110931"/>
+                </a:lnTo>
+                <a:lnTo>
+                  <a:pt x="461785" y="85389"/>
+                </a:lnTo>
+                <a:lnTo>
+                  <a:pt x="511138" y="63028"/>
+                </a:lnTo>
+                <a:lnTo>
+                  <a:pt x="561848" y="43942"/>
+                </a:lnTo>
+                <a:lnTo>
+                  <a:pt x="613698" y="28213"/>
+                </a:lnTo>
+                <a:lnTo>
+                  <a:pt x="666465" y="15910"/>
+                </a:lnTo>
+                <a:lnTo>
+                  <a:pt x="719924" y="7084"/>
+                </a:lnTo>
+                <a:lnTo>
+                  <a:pt x="773846" y="1773"/>
+                </a:lnTo>
+                <a:lnTo>
+                  <a:pt x="828000" y="0"/>
+                </a:lnTo>
+                <a:close/>
+              </a:path>
+            </a:pathLst>
+          </a:custGeom>
           <a:solidFill>
-            <a:srgbClr val="FFFFFF"/>
+            <a:srgbClr val="B198FF"/>
           </a:solidFill>
           <a:ln>
             <a:noFill/>
@@ -3746,97 +3862,14 @@
       </p:sp>
       <p:sp>
         <p:nvSpPr>
-          <p:cNvPr id="4" name="Rounded Rectangle 3"/>
-          <p:cNvSpPr/>
+          <p:cNvPr id="4" name="텍스트"/>
+          <p:cNvSpPr txBox="1"/>
           <p:nvPr/>
         </p:nvSpPr>
         <p:spPr>
           <a:xfrm>
-            <a:off x="1584000" y="489600"/>
-            <a:ext cx="72000" cy="201600"/>
-          </a:xfrm>
-          <a:prstGeom prst="roundRect">
-            <a:avLst>
-              <a:gd name="adj" fmla="val 10000"/>
-            </a:avLst>
-          </a:prstGeom>
-          <a:solidFill>
-            <a:srgbClr val="808080"/>
-          </a:solidFill>
-          <a:ln>
-            <a:noFill/>
-          </a:ln>
-        </p:spPr>
-        <p:txBody>
-          <a:bodyPr rtlCol="0" anchor="ctr"/>
-          <a:lstStyle/>
-          <a:p>
-            <a:pPr algn="ctr"/>
-          </a:p>
-        </p:txBody>
-      </p:sp>
-      <p:sp>
-        <p:nvSpPr>
-          <p:cNvPr id="5" name="Rounded Rectangle 4"/>
-          <p:cNvSpPr/>
-          <p:nvPr/>
-        </p:nvSpPr>
-        <p:spPr>
-          <a:xfrm>
-            <a:off x="1677600" y="403200"/>
-            <a:ext cx="72000" cy="288000"/>
-          </a:xfrm>
-          <a:prstGeom prst="roundRect">
-            <a:avLst>
-              <a:gd name="adj" fmla="val 10000"/>
-            </a:avLst>
-          </a:prstGeom>
-          <a:solidFill>
-            <a:srgbClr val="FFFFFF"/>
-          </a:solidFill>
-          <a:ln>
-            <a:noFill/>
-          </a:ln>
-        </p:spPr>
-        <p:txBody>
-          <a:bodyPr rtlCol="0" anchor="ctr"/>
-          <a:lstStyle/>
-          <a:p>
-            <a:pPr algn="ctr"/>
-          </a:p>
-        </p:txBody>
-      </p:sp>
-      <p:cxnSp>
-        <p:nvCxnSpPr>
-          <p:cNvPr id="6" name="Connector 5"/>
-          <p:cNvCxnSpPr/>
-          <p:nvPr/>
-        </p:nvCxnSpPr>
-        <p:spPr>
-          <a:xfrm>
-            <a:off x="1461600" y="705600"/>
-            <a:ext cx="316800" cy="0"/>
-          </a:xfrm>
-          <a:prstGeom prst="line">
-            <a:avLst/>
-          </a:prstGeom>
-          <a:ln w="14400">
-            <a:solidFill>
-              <a:srgbClr val="808080"/>
-            </a:solidFill>
-          </a:ln>
-        </p:spPr>
-      </p:cxnSp>
-      <p:sp>
-        <p:nvSpPr>
-          <p:cNvPr id="7" name="텍스트"/>
-          <p:cNvSpPr txBox="1"/>
-          <p:nvPr/>
-        </p:nvSpPr>
-        <p:spPr>
-          <a:xfrm>
-            <a:off x="396000" y="835200"/>
-            <a:ext cx="2448000" cy="396000"/>
+            <a:off x="252000" y="432000"/>
+            <a:ext cx="2304000" cy="720000"/>
           </a:xfrm>
           <a:prstGeom prst="rect">
             <a:avLst/>
@@ -3844,23 +3877,23 @@
           <a:noFill/>
         </p:spPr>
         <p:txBody>
-          <a:bodyPr wrap="square" lIns="0" rIns="0" tIns="0" bIns="0" anchor="ctr">
+          <a:bodyPr wrap="square" lIns="0" rIns="0" tIns="0" bIns="0" anchor="t">
             <a:spAutoFit/>
           </a:bodyPr>
           <a:lstStyle/>
           <a:p>
-            <a:pPr algn="ctr">
+            <a:pPr algn="l">
               <a:lnSpc>
-                <a:spcPts val="1667"/>
+                <a:spcPts val="1884"/>
               </a:lnSpc>
             </a:pPr>
             <a:r>
-              <a:rPr sz="1150" b="1">
+              <a:rPr sz="1300" b="1">
                 <a:solidFill>
-                  <a:srgbClr val="FFFFFF"/>
+                  <a:srgbClr val="12151C"/>
                 </a:solidFill>
-                <a:latin typeface="바탕"/>
-                <a:ea typeface="바탕"/>
+                <a:latin typeface="맑은 고딕"/>
+                <a:ea typeface="맑은 고딕"/>
               </a:rPr>
               <a:t>어려울 땐 먼저 손을 내밉니다</a:t>
             </a:r>
@@ -3869,14 +3902,14 @@
       </p:sp>
       <p:sp>
         <p:nvSpPr>
-          <p:cNvPr id="8" name="텍스트"/>
+          <p:cNvPr id="5" name="텍스트"/>
           <p:cNvSpPr txBox="1"/>
           <p:nvPr/>
         </p:nvSpPr>
         <p:spPr>
           <a:xfrm>
-            <a:off x="360000" y="1476000"/>
-            <a:ext cx="2520000" cy="108000"/>
+            <a:off x="252000" y="1476000"/>
+            <a:ext cx="1800000" cy="133351"/>
           </a:xfrm>
           <a:prstGeom prst="rect">
             <a:avLst/>
@@ -3889,15 +3922,15 @@
           </a:bodyPr>
           <a:lstStyle/>
           <a:p>
-            <a:pPr algn="ctr">
+            <a:pPr algn="l">
               <a:lnSpc>
                 <a:spcPts val="1015"/>
               </a:lnSpc>
             </a:pPr>
             <a:r>
-              <a:rPr sz="700" b="1" spc="300">
+              <a:rPr sz="700" b="1" spc="200">
                 <a:solidFill>
-                  <a:srgbClr val="FFFFFF"/>
+                  <a:srgbClr val="12151C"/>
                 </a:solidFill>
                 <a:latin typeface="맑은 고딕"/>
                 <a:ea typeface="맑은 고딕"/>

--- a/public/fun/cards/office/office-41.pptx
+++ b/public/fun/cards/office/office-41.pptx
@@ -3099,105 +3099,134 @@
       <p:grpSpPr/>
       <p:sp>
         <p:nvSpPr>
-          <p:cNvPr id="2" name="Freeform 1"/>
+          <p:cNvPr id="2" name="Oval 1"/>
           <p:cNvSpPr/>
           <p:nvPr/>
         </p:nvSpPr>
         <p:spPr>
           <a:xfrm>
-            <a:off x="2268000" y="0"/>
-            <a:ext cx="972000" cy="972000"/>
-          </a:xfrm>
-          <a:custGeom>
+            <a:off x="2304000" y="684000"/>
+            <a:ext cx="432000" cy="432000"/>
+          </a:xfrm>
+          <a:prstGeom prst="ellipse">
             <a:avLst/>
-            <a:gdLst/>
-            <a:ahLst/>
-            <a:cxnLst/>
-            <a:rect l="l" t="t" r="r" b="b"/>
-            <a:pathLst>
-              <a:path w="972000" h="972000">
-                <a:moveTo>
-                  <a:pt x="972000" y="0"/>
-                </a:moveTo>
-                <a:lnTo>
-                  <a:pt x="972000" y="972000"/>
-                </a:lnTo>
-                <a:lnTo>
-                  <a:pt x="908428" y="969919"/>
-                </a:lnTo>
-                <a:lnTo>
-                  <a:pt x="845129" y="963684"/>
-                </a:lnTo>
-                <a:lnTo>
-                  <a:pt x="782372" y="953323"/>
-                </a:lnTo>
-                <a:lnTo>
-                  <a:pt x="720428" y="938880"/>
-                </a:lnTo>
-                <a:lnTo>
-                  <a:pt x="659561" y="920416"/>
-                </a:lnTo>
-                <a:lnTo>
-                  <a:pt x="600032" y="898011"/>
-                </a:lnTo>
-                <a:lnTo>
-                  <a:pt x="542095" y="871760"/>
-                </a:lnTo>
-                <a:lnTo>
-                  <a:pt x="486000" y="841777"/>
-                </a:lnTo>
-                <a:lnTo>
-                  <a:pt x="431986" y="808188"/>
-                </a:lnTo>
-                <a:lnTo>
-                  <a:pt x="380284" y="771139"/>
-                </a:lnTo>
-                <a:lnTo>
-                  <a:pt x="331116" y="730788"/>
-                </a:lnTo>
-                <a:lnTo>
-                  <a:pt x="284692" y="687308"/>
-                </a:lnTo>
-                <a:lnTo>
-                  <a:pt x="241212" y="640884"/>
-                </a:lnTo>
-                <a:lnTo>
-                  <a:pt x="200861" y="591716"/>
-                </a:lnTo>
-                <a:lnTo>
-                  <a:pt x="163812" y="540014"/>
-                </a:lnTo>
-                <a:lnTo>
-                  <a:pt x="130223" y="486000"/>
-                </a:lnTo>
-                <a:lnTo>
-                  <a:pt x="100240" y="429905"/>
-                </a:lnTo>
-                <a:lnTo>
-                  <a:pt x="73989" y="371968"/>
-                </a:lnTo>
-                <a:lnTo>
-                  <a:pt x="51584" y="312439"/>
-                </a:lnTo>
-                <a:lnTo>
-                  <a:pt x="33120" y="251572"/>
-                </a:lnTo>
-                <a:lnTo>
-                  <a:pt x="18677" y="189628"/>
-                </a:lnTo>
-                <a:lnTo>
-                  <a:pt x="8316" y="126871"/>
-                </a:lnTo>
-                <a:lnTo>
-                  <a:pt x="2081" y="63572"/>
-                </a:lnTo>
-                <a:lnTo>
-                  <a:pt x="0" y="0"/>
-                </a:lnTo>
-                <a:close/>
-              </a:path>
-            </a:pathLst>
-          </a:custGeom>
+          </a:prstGeom>
+          <a:noFill/>
+          <a:ln w="4320">
+            <a:solidFill>
+              <a:srgbClr val="DCDFE4"/>
+            </a:solidFill>
+          </a:ln>
+        </p:spPr>
+        <p:txBody>
+          <a:bodyPr rtlCol="0" anchor="ctr"/>
+          <a:lstStyle/>
+          <a:p>
+            <a:pPr algn="ctr"/>
+          </a:p>
+        </p:txBody>
+      </p:sp>
+      <p:sp>
+        <p:nvSpPr>
+          <p:cNvPr id="3" name="Oval 2"/>
+          <p:cNvSpPr/>
+          <p:nvPr/>
+        </p:nvSpPr>
+        <p:spPr>
+          <a:xfrm>
+            <a:off x="2124000" y="504000"/>
+            <a:ext cx="792000" cy="792000"/>
+          </a:xfrm>
+          <a:prstGeom prst="ellipse">
+            <a:avLst/>
+          </a:prstGeom>
+          <a:noFill/>
+          <a:ln w="4320">
+            <a:solidFill>
+              <a:srgbClr val="DCDFE4"/>
+            </a:solidFill>
+          </a:ln>
+        </p:spPr>
+        <p:txBody>
+          <a:bodyPr rtlCol="0" anchor="ctr"/>
+          <a:lstStyle/>
+          <a:p>
+            <a:pPr algn="ctr"/>
+          </a:p>
+        </p:txBody>
+      </p:sp>
+      <p:sp>
+        <p:nvSpPr>
+          <p:cNvPr id="4" name="Oval 3"/>
+          <p:cNvSpPr/>
+          <p:nvPr/>
+        </p:nvSpPr>
+        <p:spPr>
+          <a:xfrm>
+            <a:off x="1980000" y="360000"/>
+            <a:ext cx="1080000" cy="1080000"/>
+          </a:xfrm>
+          <a:prstGeom prst="ellipse">
+            <a:avLst/>
+          </a:prstGeom>
+          <a:noFill/>
+          <a:ln w="4320">
+            <a:solidFill>
+              <a:srgbClr val="DCDFE4"/>
+            </a:solidFill>
+          </a:ln>
+        </p:spPr>
+        <p:txBody>
+          <a:bodyPr rtlCol="0" anchor="ctr"/>
+          <a:lstStyle/>
+          <a:p>
+            <a:pPr algn="ctr"/>
+          </a:p>
+        </p:txBody>
+      </p:sp>
+      <p:sp>
+        <p:nvSpPr>
+          <p:cNvPr id="5" name="Oval 4"/>
+          <p:cNvSpPr/>
+          <p:nvPr/>
+        </p:nvSpPr>
+        <p:spPr>
+          <a:xfrm>
+            <a:off x="1872000" y="252000"/>
+            <a:ext cx="1296000" cy="1296000"/>
+          </a:xfrm>
+          <a:prstGeom prst="ellipse">
+            <a:avLst/>
+          </a:prstGeom>
+          <a:noFill/>
+          <a:ln w="4320">
+            <a:solidFill>
+              <a:srgbClr val="9B7BFF"/>
+            </a:solidFill>
+          </a:ln>
+        </p:spPr>
+        <p:txBody>
+          <a:bodyPr rtlCol="0" anchor="ctr"/>
+          <a:lstStyle/>
+          <a:p>
+            <a:pPr algn="ctr"/>
+          </a:p>
+        </p:txBody>
+      </p:sp>
+      <p:sp>
+        <p:nvSpPr>
+          <p:cNvPr id="6" name="Oval 5"/>
+          <p:cNvSpPr/>
+          <p:nvPr/>
+        </p:nvSpPr>
+        <p:spPr>
+          <a:xfrm>
+            <a:off x="2469600" y="849600"/>
+            <a:ext cx="100800" cy="100800"/>
+          </a:xfrm>
+          <a:prstGeom prst="ellipse">
+            <a:avLst/>
+          </a:prstGeom>
           <a:solidFill>
             <a:srgbClr val="9B7BFF"/>
           </a:solidFill>
@@ -3215,107 +3244,20 @@
       </p:sp>
       <p:sp>
         <p:nvSpPr>
-          <p:cNvPr id="3" name="Freeform 2"/>
+          <p:cNvPr id="7" name="Oval 6"/>
           <p:cNvSpPr/>
           <p:nvPr/>
         </p:nvSpPr>
         <p:spPr>
           <a:xfrm>
-            <a:off x="2664000" y="0"/>
-            <a:ext cx="576000" cy="576000"/>
-          </a:xfrm>
-          <a:custGeom>
+            <a:off x="2955600" y="421200"/>
+            <a:ext cx="43200" cy="43200"/>
+          </a:xfrm>
+          <a:prstGeom prst="ellipse">
             <a:avLst/>
-            <a:gdLst/>
-            <a:ahLst/>
-            <a:cxnLst/>
-            <a:rect l="l" t="t" r="r" b="b"/>
-            <a:pathLst>
-              <a:path w="576000" h="576000">
-                <a:moveTo>
-                  <a:pt x="576000" y="0"/>
-                </a:moveTo>
-                <a:lnTo>
-                  <a:pt x="576000" y="576000"/>
-                </a:lnTo>
-                <a:lnTo>
-                  <a:pt x="538328" y="574767"/>
-                </a:lnTo>
-                <a:lnTo>
-                  <a:pt x="500817" y="571072"/>
-                </a:lnTo>
-                <a:lnTo>
-                  <a:pt x="463628" y="564932"/>
-                </a:lnTo>
-                <a:lnTo>
-                  <a:pt x="426920" y="556373"/>
-                </a:lnTo>
-                <a:lnTo>
-                  <a:pt x="390851" y="545432"/>
-                </a:lnTo>
-                <a:lnTo>
-                  <a:pt x="355574" y="532155"/>
-                </a:lnTo>
-                <a:lnTo>
-                  <a:pt x="321242" y="516599"/>
-                </a:lnTo>
-                <a:lnTo>
-                  <a:pt x="288000" y="498831"/>
-                </a:lnTo>
-                <a:lnTo>
-                  <a:pt x="255992" y="478926"/>
-                </a:lnTo>
-                <a:lnTo>
-                  <a:pt x="225353" y="456972"/>
-                </a:lnTo>
-                <a:lnTo>
-                  <a:pt x="196217" y="433060"/>
-                </a:lnTo>
-                <a:lnTo>
-                  <a:pt x="168706" y="407294"/>
-                </a:lnTo>
-                <a:lnTo>
-                  <a:pt x="142940" y="379783"/>
-                </a:lnTo>
-                <a:lnTo>
-                  <a:pt x="119028" y="350647"/>
-                </a:lnTo>
-                <a:lnTo>
-                  <a:pt x="97074" y="320008"/>
-                </a:lnTo>
-                <a:lnTo>
-                  <a:pt x="77169" y="288000"/>
-                </a:lnTo>
-                <a:lnTo>
-                  <a:pt x="59401" y="254758"/>
-                </a:lnTo>
-                <a:lnTo>
-                  <a:pt x="43845" y="220426"/>
-                </a:lnTo>
-                <a:lnTo>
-                  <a:pt x="30568" y="185149"/>
-                </a:lnTo>
-                <a:lnTo>
-                  <a:pt x="19627" y="149080"/>
-                </a:lnTo>
-                <a:lnTo>
-                  <a:pt x="11068" y="112372"/>
-                </a:lnTo>
-                <a:lnTo>
-                  <a:pt x="4928" y="75183"/>
-                </a:lnTo>
-                <a:lnTo>
-                  <a:pt x="1233" y="37672"/>
-                </a:lnTo>
-                <a:lnTo>
-                  <a:pt x="0" y="0"/>
-                </a:lnTo>
-                <a:close/>
-              </a:path>
-            </a:pathLst>
-          </a:custGeom>
+          </a:prstGeom>
           <a:solidFill>
-            <a:srgbClr val="E7E3F7"/>
+            <a:srgbClr val="9B7BFF"/>
           </a:solidFill>
           <a:ln>
             <a:noFill/>
@@ -3331,14 +3273,14 @@
       </p:sp>
       <p:sp>
         <p:nvSpPr>
-          <p:cNvPr id="4" name="텍스트"/>
+          <p:cNvPr id="8" name="텍스트"/>
           <p:cNvSpPr txBox="1"/>
           <p:nvPr/>
         </p:nvSpPr>
         <p:spPr>
           <a:xfrm>
-            <a:off x="252000" y="540000"/>
-            <a:ext cx="1944000" cy="360000"/>
+            <a:off x="252000" y="252000"/>
+            <a:ext cx="1512000" cy="123826"/>
           </a:xfrm>
           <a:prstGeom prst="rect">
             <a:avLst/>
@@ -3353,11 +3295,51 @@
           <a:p>
             <a:pPr algn="l">
               <a:lnSpc>
-                <a:spcPts val="3190"/>
+                <a:spcPts val="942"/>
               </a:lnSpc>
             </a:pPr>
             <a:r>
-              <a:rPr sz="2200" b="1">
+              <a:rPr sz="650" b="1" spc="220">
+                <a:solidFill>
+                  <a:srgbClr val="6B7280"/>
+                </a:solidFill>
+                <a:latin typeface="맑은 고딕"/>
+                <a:ea typeface="맑은 고딕"/>
+              </a:rPr>
+              <a:t>회사명 · 부서명</a:t>
+            </a:r>
+          </a:p>
+        </p:txBody>
+      </p:sp>
+      <p:sp>
+        <p:nvSpPr>
+          <p:cNvPr id="9" name="텍스트"/>
+          <p:cNvSpPr txBox="1"/>
+          <p:nvPr/>
+        </p:nvSpPr>
+        <p:spPr>
+          <a:xfrm>
+            <a:off x="252000" y="612000"/>
+            <a:ext cx="1800000" cy="237600"/>
+          </a:xfrm>
+          <a:prstGeom prst="rect">
+            <a:avLst/>
+          </a:prstGeom>
+          <a:noFill/>
+        </p:spPr>
+        <p:txBody>
+          <a:bodyPr wrap="square" lIns="0" rIns="0" tIns="0" bIns="0" anchor="t">
+            <a:spAutoFit/>
+          </a:bodyPr>
+          <a:lstStyle/>
+          <a:p>
+            <a:pPr algn="l">
+              <a:lnSpc>
+                <a:spcPts val="1957"/>
+              </a:lnSpc>
+            </a:pPr>
+            <a:r>
+              <a:rPr sz="1350" b="1" spc="120">
                 <a:solidFill>
                   <a:srgbClr val="12151C"/>
                 </a:solidFill>
@@ -3371,14 +3353,14 @@
       </p:sp>
       <p:sp>
         <p:nvSpPr>
-          <p:cNvPr id="5" name="텍스트"/>
+          <p:cNvPr id="10" name="텍스트"/>
           <p:cNvSpPr txBox="1"/>
           <p:nvPr/>
         </p:nvSpPr>
         <p:spPr>
           <a:xfrm>
-            <a:off x="252000" y="943200"/>
-            <a:ext cx="1944000" cy="171451"/>
+            <a:off x="252000" y="864000"/>
+            <a:ext cx="1800000" cy="133351"/>
           </a:xfrm>
           <a:prstGeom prst="rect">
             <a:avLst/>
@@ -3393,11 +3375,11 @@
           <a:p>
             <a:pPr algn="l">
               <a:lnSpc>
-                <a:spcPts val="1305"/>
+                <a:spcPts val="1015"/>
               </a:lnSpc>
             </a:pPr>
             <a:r>
-              <a:rPr sz="900" b="0">
+              <a:rPr sz="700" b="0" spc="60">
                 <a:solidFill>
                   <a:srgbClr val="6B7280"/>
                 </a:solidFill>
@@ -3411,14 +3393,43 @@
       </p:sp>
       <p:sp>
         <p:nvSpPr>
-          <p:cNvPr id="6" name="텍스트"/>
+          <p:cNvPr id="11" name="Rectangle 10"/>
+          <p:cNvSpPr/>
+          <p:nvPr/>
+        </p:nvSpPr>
+        <p:spPr>
+          <a:xfrm>
+            <a:off x="252000" y="1080000"/>
+            <a:ext cx="129600" cy="14400"/>
+          </a:xfrm>
+          <a:prstGeom prst="rect">
+            <a:avLst/>
+          </a:prstGeom>
+          <a:solidFill>
+            <a:srgbClr val="9B7BFF"/>
+          </a:solidFill>
+          <a:ln>
+            <a:noFill/>
+          </a:ln>
+        </p:spPr>
+        <p:txBody>
+          <a:bodyPr rtlCol="0" anchor="ctr"/>
+          <a:lstStyle/>
+          <a:p>
+            <a:pPr algn="ctr"/>
+          </a:p>
+        </p:txBody>
+      </p:sp>
+      <p:sp>
+        <p:nvSpPr>
+          <p:cNvPr id="12" name="텍스트"/>
           <p:cNvSpPr txBox="1"/>
           <p:nvPr/>
         </p:nvSpPr>
         <p:spPr>
           <a:xfrm>
-            <a:off x="252000" y="223200"/>
-            <a:ext cx="1440000" cy="133351"/>
+            <a:off x="252000" y="1213200"/>
+            <a:ext cx="331200" cy="91441"/>
           </a:xfrm>
           <a:prstGeom prst="rect">
             <a:avLst/>
@@ -3433,51 +3444,11 @@
           <a:p>
             <a:pPr algn="l">
               <a:lnSpc>
-                <a:spcPts val="1015"/>
+                <a:spcPts val="696"/>
               </a:lnSpc>
             </a:pPr>
             <a:r>
-              <a:rPr sz="700" b="1" spc="200">
-                <a:solidFill>
-                  <a:srgbClr val="6B7280"/>
-                </a:solidFill>
-                <a:latin typeface="맑은 고딕"/>
-                <a:ea typeface="맑은 고딕"/>
-              </a:rPr>
-              <a:t>회사명 · 부서명</a:t>
-            </a:r>
-          </a:p>
-        </p:txBody>
-      </p:sp>
-      <p:sp>
-        <p:nvSpPr>
-          <p:cNvPr id="7" name="텍스트"/>
-          <p:cNvSpPr txBox="1"/>
-          <p:nvPr/>
-        </p:nvSpPr>
-        <p:spPr>
-          <a:xfrm>
-            <a:off x="252000" y="1234800"/>
-            <a:ext cx="331200" cy="99061"/>
-          </a:xfrm>
-          <a:prstGeom prst="rect">
-            <a:avLst/>
-          </a:prstGeom>
-          <a:noFill/>
-        </p:spPr>
-        <p:txBody>
-          <a:bodyPr wrap="square" lIns="0" rIns="0" tIns="0" bIns="0" anchor="t">
-            <a:spAutoFit/>
-          </a:bodyPr>
-          <a:lstStyle/>
-          <a:p>
-            <a:pPr algn="l">
-              <a:lnSpc>
-                <a:spcPts val="754"/>
-              </a:lnSpc>
-            </a:pPr>
-            <a:r>
-              <a:rPr sz="520" b="1" spc="120">
+              <a:rPr sz="480" b="1" spc="140">
                 <a:solidFill>
                   <a:srgbClr val="6B7280"/>
                 </a:solidFill>
@@ -3491,14 +3462,14 @@
       </p:sp>
       <p:sp>
         <p:nvSpPr>
-          <p:cNvPr id="8" name="텍스트"/>
+          <p:cNvPr id="13" name="텍스트"/>
           <p:cNvSpPr txBox="1"/>
           <p:nvPr/>
         </p:nvSpPr>
         <p:spPr>
           <a:xfrm>
-            <a:off x="583200" y="1224000"/>
-            <a:ext cx="1512000" cy="133351"/>
+            <a:off x="583200" y="1202400"/>
+            <a:ext cx="1188000" cy="123826"/>
           </a:xfrm>
           <a:prstGeom prst="rect">
             <a:avLst/>
@@ -3513,11 +3484,11 @@
           <a:p>
             <a:pPr algn="l">
               <a:lnSpc>
-                <a:spcPts val="1015"/>
+                <a:spcPts val="942"/>
               </a:lnSpc>
             </a:pPr>
             <a:r>
-              <a:rPr sz="700" b="0">
+              <a:rPr sz="650" b="0">
                 <a:solidFill>
                   <a:srgbClr val="12151C"/>
                 </a:solidFill>
@@ -3531,14 +3502,14 @@
       </p:sp>
       <p:sp>
         <p:nvSpPr>
-          <p:cNvPr id="9" name="텍스트"/>
+          <p:cNvPr id="14" name="텍스트"/>
           <p:cNvSpPr txBox="1"/>
           <p:nvPr/>
         </p:nvSpPr>
         <p:spPr>
           <a:xfrm>
-            <a:off x="252000" y="1371600"/>
-            <a:ext cx="331200" cy="99061"/>
+            <a:off x="252000" y="1342800"/>
+            <a:ext cx="331200" cy="91441"/>
           </a:xfrm>
           <a:prstGeom prst="rect">
             <a:avLst/>
@@ -3553,11 +3524,11 @@
           <a:p>
             <a:pPr algn="l">
               <a:lnSpc>
-                <a:spcPts val="754"/>
+                <a:spcPts val="696"/>
               </a:lnSpc>
             </a:pPr>
             <a:r>
-              <a:rPr sz="520" b="1" spc="120">
+              <a:rPr sz="480" b="1" spc="140">
                 <a:solidFill>
                   <a:srgbClr val="6B7280"/>
                 </a:solidFill>
@@ -3571,14 +3542,14 @@
       </p:sp>
       <p:sp>
         <p:nvSpPr>
-          <p:cNvPr id="10" name="텍스트"/>
+          <p:cNvPr id="15" name="텍스트"/>
           <p:cNvSpPr txBox="1"/>
           <p:nvPr/>
         </p:nvSpPr>
         <p:spPr>
           <a:xfrm>
-            <a:off x="583200" y="1360800"/>
-            <a:ext cx="1512000" cy="133351"/>
+            <a:off x="583200" y="1332000"/>
+            <a:ext cx="1188000" cy="123826"/>
           </a:xfrm>
           <a:prstGeom prst="rect">
             <a:avLst/>
@@ -3593,11 +3564,11 @@
           <a:p>
             <a:pPr algn="l">
               <a:lnSpc>
-                <a:spcPts val="1015"/>
+                <a:spcPts val="942"/>
               </a:lnSpc>
             </a:pPr>
             <a:r>
-              <a:rPr sz="700" b="0">
+              <a:rPr sz="650" b="0">
                 <a:solidFill>
                   <a:srgbClr val="12151C"/>
                 </a:solidFill>
@@ -3611,14 +3582,14 @@
       </p:sp>
       <p:sp>
         <p:nvSpPr>
-          <p:cNvPr id="11" name="텍스트"/>
+          <p:cNvPr id="16" name="텍스트"/>
           <p:cNvSpPr txBox="1"/>
           <p:nvPr/>
         </p:nvSpPr>
         <p:spPr>
           <a:xfrm>
-            <a:off x="252000" y="1508400"/>
-            <a:ext cx="331200" cy="99061"/>
+            <a:off x="252000" y="1472400"/>
+            <a:ext cx="331200" cy="91441"/>
           </a:xfrm>
           <a:prstGeom prst="rect">
             <a:avLst/>
@@ -3633,11 +3604,11 @@
           <a:p>
             <a:pPr algn="l">
               <a:lnSpc>
-                <a:spcPts val="754"/>
+                <a:spcPts val="696"/>
               </a:lnSpc>
             </a:pPr>
             <a:r>
-              <a:rPr sz="520" b="1" spc="120">
+              <a:rPr sz="480" b="1" spc="140">
                 <a:solidFill>
                   <a:srgbClr val="6B7280"/>
                 </a:solidFill>
@@ -3651,14 +3622,14 @@
       </p:sp>
       <p:sp>
         <p:nvSpPr>
-          <p:cNvPr id="12" name="텍스트"/>
+          <p:cNvPr id="17" name="텍스트"/>
           <p:cNvSpPr txBox="1"/>
           <p:nvPr/>
         </p:nvSpPr>
         <p:spPr>
           <a:xfrm>
-            <a:off x="583200" y="1497600"/>
-            <a:ext cx="1512000" cy="133351"/>
+            <a:off x="583200" y="1461600"/>
+            <a:ext cx="1188000" cy="123826"/>
           </a:xfrm>
           <a:prstGeom prst="rect">
             <a:avLst/>
@@ -3673,11 +3644,11 @@
           <a:p>
             <a:pPr algn="l">
               <a:lnSpc>
-                <a:spcPts val="1015"/>
+                <a:spcPts val="942"/>
               </a:lnSpc>
             </a:pPr>
             <a:r>
-              <a:rPr sz="700" b="0">
+              <a:rPr sz="650" b="0">
                 <a:solidFill>
                   <a:srgbClr val="12151C"/>
                 </a:solidFill>
@@ -3717,14 +3688,54 @@
       <p:grpSpPr/>
       <p:sp>
         <p:nvSpPr>
-          <p:cNvPr id="2" name="Rectangle 1"/>
+          <p:cNvPr id="2" name="텍스트"/>
+          <p:cNvSpPr txBox="1"/>
+          <p:nvPr/>
+        </p:nvSpPr>
+        <p:spPr>
+          <a:xfrm>
+            <a:off x="252000" y="252000"/>
+            <a:ext cx="1080000" cy="99061"/>
+          </a:xfrm>
+          <a:prstGeom prst="rect">
+            <a:avLst/>
+          </a:prstGeom>
+          <a:noFill/>
+        </p:spPr>
+        <p:txBody>
+          <a:bodyPr wrap="square" lIns="0" rIns="0" tIns="0" bIns="0" anchor="t">
+            <a:spAutoFit/>
+          </a:bodyPr>
+          <a:lstStyle/>
+          <a:p>
+            <a:pPr algn="l">
+              <a:lnSpc>
+                <a:spcPts val="754"/>
+              </a:lnSpc>
+            </a:pPr>
+            <a:r>
+              <a:rPr sz="520" b="1" spc="240">
+                <a:solidFill>
+                  <a:srgbClr val="463C72"/>
+                </a:solidFill>
+                <a:latin typeface="맑은 고딕"/>
+                <a:ea typeface="맑은 고딕"/>
+              </a:rPr>
+              <a:t>담당 업무</a:t>
+            </a:r>
+          </a:p>
+        </p:txBody>
+      </p:sp>
+      <p:sp>
+        <p:nvSpPr>
+          <p:cNvPr id="3" name="Rectangle 2"/>
           <p:cNvSpPr/>
           <p:nvPr/>
         </p:nvSpPr>
         <p:spPr>
           <a:xfrm>
-            <a:off x="0" y="0"/>
-            <a:ext cx="3240000" cy="1800000"/>
+            <a:off x="252000" y="352800"/>
+            <a:ext cx="108000" cy="14400"/>
           </a:xfrm>
           <a:prstGeom prst="rect">
             <a:avLst/>
@@ -3744,132 +3755,37 @@
           </a:p>
         </p:txBody>
       </p:sp>
-      <p:sp>
-        <p:nvSpPr>
-          <p:cNvPr id="3" name="Freeform 2"/>
-          <p:cNvSpPr/>
+      <p:cxnSp>
+        <p:nvCxnSpPr>
+          <p:cNvPr id="4" name="Connector 3"/>
+          <p:cNvCxnSpPr/>
           <p:nvPr/>
-        </p:nvSpPr>
-        <p:spPr>
-          <a:xfrm>
-            <a:off x="2412000" y="972000"/>
-            <a:ext cx="828000" cy="828000"/>
-          </a:xfrm>
-          <a:custGeom>
+        </p:nvCxnSpPr>
+        <p:spPr>
+          <a:xfrm>
+            <a:off x="252000" y="453600"/>
+            <a:ext cx="1512000" cy="0"/>
+          </a:xfrm>
+          <a:prstGeom prst="line">
             <a:avLst/>
-            <a:gdLst/>
-            <a:ahLst/>
-            <a:cxnLst/>
-            <a:rect l="l" t="t" r="r" b="b"/>
-            <a:pathLst>
-              <a:path w="828000" h="828000">
-                <a:moveTo>
-                  <a:pt x="828000" y="828000"/>
-                </a:moveTo>
-                <a:lnTo>
-                  <a:pt x="0" y="828000"/>
-                </a:lnTo>
-                <a:lnTo>
-                  <a:pt x="1773" y="773846"/>
-                </a:lnTo>
-                <a:lnTo>
-                  <a:pt x="7084" y="719924"/>
-                </a:lnTo>
-                <a:lnTo>
-                  <a:pt x="15910" y="666465"/>
-                </a:lnTo>
-                <a:lnTo>
-                  <a:pt x="28213" y="613698"/>
-                </a:lnTo>
-                <a:lnTo>
-                  <a:pt x="43942" y="561848"/>
-                </a:lnTo>
-                <a:lnTo>
-                  <a:pt x="63028" y="511138"/>
-                </a:lnTo>
-                <a:lnTo>
-                  <a:pt x="85389" y="461785"/>
-                </a:lnTo>
-                <a:lnTo>
-                  <a:pt x="110931" y="414000"/>
-                </a:lnTo>
-                <a:lnTo>
-                  <a:pt x="139543" y="367988"/>
-                </a:lnTo>
-                <a:lnTo>
-                  <a:pt x="171103" y="323946"/>
-                </a:lnTo>
-                <a:lnTo>
-                  <a:pt x="205477" y="282062"/>
-                </a:lnTo>
-                <a:lnTo>
-                  <a:pt x="242516" y="242516"/>
-                </a:lnTo>
-                <a:lnTo>
-                  <a:pt x="282062" y="205477"/>
-                </a:lnTo>
-                <a:lnTo>
-                  <a:pt x="323946" y="171103"/>
-                </a:lnTo>
-                <a:lnTo>
-                  <a:pt x="367988" y="139543"/>
-                </a:lnTo>
-                <a:lnTo>
-                  <a:pt x="414000" y="110931"/>
-                </a:lnTo>
-                <a:lnTo>
-                  <a:pt x="461785" y="85389"/>
-                </a:lnTo>
-                <a:lnTo>
-                  <a:pt x="511138" y="63028"/>
-                </a:lnTo>
-                <a:lnTo>
-                  <a:pt x="561848" y="43942"/>
-                </a:lnTo>
-                <a:lnTo>
-                  <a:pt x="613698" y="28213"/>
-                </a:lnTo>
-                <a:lnTo>
-                  <a:pt x="666465" y="15910"/>
-                </a:lnTo>
-                <a:lnTo>
-                  <a:pt x="719924" y="7084"/>
-                </a:lnTo>
-                <a:lnTo>
-                  <a:pt x="773846" y="1773"/>
-                </a:lnTo>
-                <a:lnTo>
-                  <a:pt x="828000" y="0"/>
-                </a:lnTo>
-                <a:close/>
-              </a:path>
-            </a:pathLst>
-          </a:custGeom>
-          <a:solidFill>
-            <a:srgbClr val="B198FF"/>
-          </a:solidFill>
-          <a:ln>
-            <a:noFill/>
+          </a:prstGeom>
+          <a:ln w="3600">
+            <a:solidFill>
+              <a:srgbClr val="E3DAFF"/>
+            </a:solidFill>
           </a:ln>
         </p:spPr>
-        <p:txBody>
-          <a:bodyPr rtlCol="0" anchor="ctr"/>
-          <a:lstStyle/>
-          <a:p>
-            <a:pPr algn="ctr"/>
-          </a:p>
-        </p:txBody>
-      </p:sp>
-      <p:sp>
-        <p:nvSpPr>
-          <p:cNvPr id="4" name="텍스트"/>
+      </p:cxnSp>
+      <p:sp>
+        <p:nvSpPr>
+          <p:cNvPr id="5" name="텍스트"/>
           <p:cNvSpPr txBox="1"/>
           <p:nvPr/>
         </p:nvSpPr>
         <p:spPr>
           <a:xfrm>
-            <a:off x="252000" y="432000"/>
-            <a:ext cx="2304000" cy="720000"/>
+            <a:off x="252000" y="507600"/>
+            <a:ext cx="216000" cy="95251"/>
           </a:xfrm>
           <a:prstGeom prst="rect">
             <a:avLst/>
@@ -3884,32 +3800,133 @@
           <a:p>
             <a:pPr algn="l">
               <a:lnSpc>
-                <a:spcPts val="1884"/>
+                <a:spcPts val="725"/>
               </a:lnSpc>
             </a:pPr>
             <a:r>
-              <a:rPr sz="1300" b="1">
+              <a:rPr sz="500" b="1" spc="100">
+                <a:solidFill>
+                  <a:srgbClr val="463C72"/>
+                </a:solidFill>
+                <a:latin typeface="맑은 고딕"/>
+                <a:ea typeface="맑은 고딕"/>
+              </a:rPr>
+              <a:t>01</a:t>
+            </a:r>
+          </a:p>
+        </p:txBody>
+      </p:sp>
+      <p:sp>
+        <p:nvSpPr>
+          <p:cNvPr id="6" name="텍스트"/>
+          <p:cNvSpPr txBox="1"/>
+          <p:nvPr/>
+        </p:nvSpPr>
+        <p:spPr>
+          <a:xfrm>
+            <a:off x="489600" y="496800"/>
+            <a:ext cx="1260000" cy="133351"/>
+          </a:xfrm>
+          <a:prstGeom prst="rect">
+            <a:avLst/>
+          </a:prstGeom>
+          <a:noFill/>
+        </p:spPr>
+        <p:txBody>
+          <a:bodyPr wrap="square" lIns="0" rIns="0" tIns="0" bIns="0" anchor="t">
+            <a:spAutoFit/>
+          </a:bodyPr>
+          <a:lstStyle/>
+          <a:p>
+            <a:pPr algn="l">
+              <a:lnSpc>
+                <a:spcPts val="1015"/>
+              </a:lnSpc>
+            </a:pPr>
+            <a:r>
+              <a:rPr sz="700" b="0">
                 <a:solidFill>
                   <a:srgbClr val="12151C"/>
                 </a:solidFill>
                 <a:latin typeface="맑은 고딕"/>
                 <a:ea typeface="맑은 고딕"/>
               </a:rPr>
-              <a:t>어려울 땐 먼저 손을 내밉니다</a:t>
-            </a:r>
-          </a:p>
-        </p:txBody>
-      </p:sp>
-      <p:sp>
-        <p:nvSpPr>
-          <p:cNvPr id="5" name="텍스트"/>
+              <a:t>영업 관리</a:t>
+            </a:r>
+          </a:p>
+        </p:txBody>
+      </p:sp>
+      <p:cxnSp>
+        <p:nvCxnSpPr>
+          <p:cNvPr id="7" name="Connector 6"/>
+          <p:cNvCxnSpPr/>
+          <p:nvPr/>
+        </p:nvCxnSpPr>
+        <p:spPr>
+          <a:xfrm>
+            <a:off x="252000" y="640800"/>
+            <a:ext cx="1512000" cy="0"/>
+          </a:xfrm>
+          <a:prstGeom prst="line">
+            <a:avLst/>
+          </a:prstGeom>
+          <a:ln w="3600">
+            <a:solidFill>
+              <a:srgbClr val="E3DAFF"/>
+            </a:solidFill>
+          </a:ln>
+        </p:spPr>
+      </p:cxnSp>
+      <p:sp>
+        <p:nvSpPr>
+          <p:cNvPr id="8" name="텍스트"/>
           <p:cNvSpPr txBox="1"/>
           <p:nvPr/>
         </p:nvSpPr>
         <p:spPr>
           <a:xfrm>
-            <a:off x="252000" y="1476000"/>
-            <a:ext cx="1800000" cy="133351"/>
+            <a:off x="252000" y="694800"/>
+            <a:ext cx="216000" cy="95251"/>
+          </a:xfrm>
+          <a:prstGeom prst="rect">
+            <a:avLst/>
+          </a:prstGeom>
+          <a:noFill/>
+        </p:spPr>
+        <p:txBody>
+          <a:bodyPr wrap="square" lIns="0" rIns="0" tIns="0" bIns="0" anchor="t">
+            <a:spAutoFit/>
+          </a:bodyPr>
+          <a:lstStyle/>
+          <a:p>
+            <a:pPr algn="l">
+              <a:lnSpc>
+                <a:spcPts val="725"/>
+              </a:lnSpc>
+            </a:pPr>
+            <a:r>
+              <a:rPr sz="500" b="1" spc="100">
+                <a:solidFill>
+                  <a:srgbClr val="463C72"/>
+                </a:solidFill>
+                <a:latin typeface="맑은 고딕"/>
+                <a:ea typeface="맑은 고딕"/>
+              </a:rPr>
+              <a:t>02</a:t>
+            </a:r>
+          </a:p>
+        </p:txBody>
+      </p:sp>
+      <p:sp>
+        <p:nvSpPr>
+          <p:cNvPr id="9" name="텍스트"/>
+          <p:cNvSpPr txBox="1"/>
+          <p:nvPr/>
+        </p:nvSpPr>
+        <p:spPr>
+          <a:xfrm>
+            <a:off x="489600" y="684000"/>
+            <a:ext cx="1260000" cy="133351"/>
           </a:xfrm>
           <a:prstGeom prst="rect">
             <a:avLst/>
@@ -3928,7 +3945,484 @@
               </a:lnSpc>
             </a:pPr>
             <a:r>
-              <a:rPr sz="700" b="1" spc="200">
+              <a:rPr sz="700" b="0">
+                <a:solidFill>
+                  <a:srgbClr val="12151C"/>
+                </a:solidFill>
+                <a:latin typeface="맑은 고딕"/>
+                <a:ea typeface="맑은 고딕"/>
+              </a:rPr>
+              <a:t>개발</a:t>
+            </a:r>
+          </a:p>
+        </p:txBody>
+      </p:sp>
+      <p:cxnSp>
+        <p:nvCxnSpPr>
+          <p:cNvPr id="10" name="Connector 9"/>
+          <p:cNvCxnSpPr/>
+          <p:nvPr/>
+        </p:nvCxnSpPr>
+        <p:spPr>
+          <a:xfrm>
+            <a:off x="252000" y="828000"/>
+            <a:ext cx="1512000" cy="0"/>
+          </a:xfrm>
+          <a:prstGeom prst="line">
+            <a:avLst/>
+          </a:prstGeom>
+          <a:ln w="3600">
+            <a:solidFill>
+              <a:srgbClr val="E3DAFF"/>
+            </a:solidFill>
+          </a:ln>
+        </p:spPr>
+      </p:cxnSp>
+      <p:sp>
+        <p:nvSpPr>
+          <p:cNvPr id="11" name="텍스트"/>
+          <p:cNvSpPr txBox="1"/>
+          <p:nvPr/>
+        </p:nvSpPr>
+        <p:spPr>
+          <a:xfrm>
+            <a:off x="252000" y="882000"/>
+            <a:ext cx="216000" cy="95251"/>
+          </a:xfrm>
+          <a:prstGeom prst="rect">
+            <a:avLst/>
+          </a:prstGeom>
+          <a:noFill/>
+        </p:spPr>
+        <p:txBody>
+          <a:bodyPr wrap="square" lIns="0" rIns="0" tIns="0" bIns="0" anchor="t">
+            <a:spAutoFit/>
+          </a:bodyPr>
+          <a:lstStyle/>
+          <a:p>
+            <a:pPr algn="l">
+              <a:lnSpc>
+                <a:spcPts val="725"/>
+              </a:lnSpc>
+            </a:pPr>
+            <a:r>
+              <a:rPr sz="500" b="1" spc="100">
+                <a:solidFill>
+                  <a:srgbClr val="463C72"/>
+                </a:solidFill>
+                <a:latin typeface="맑은 고딕"/>
+                <a:ea typeface="맑은 고딕"/>
+              </a:rPr>
+              <a:t>03</a:t>
+            </a:r>
+          </a:p>
+        </p:txBody>
+      </p:sp>
+      <p:sp>
+        <p:nvSpPr>
+          <p:cNvPr id="12" name="텍스트"/>
+          <p:cNvSpPr txBox="1"/>
+          <p:nvPr/>
+        </p:nvSpPr>
+        <p:spPr>
+          <a:xfrm>
+            <a:off x="489600" y="871200"/>
+            <a:ext cx="1260000" cy="133351"/>
+          </a:xfrm>
+          <a:prstGeom prst="rect">
+            <a:avLst/>
+          </a:prstGeom>
+          <a:noFill/>
+        </p:spPr>
+        <p:txBody>
+          <a:bodyPr wrap="square" lIns="0" rIns="0" tIns="0" bIns="0" anchor="t">
+            <a:spAutoFit/>
+          </a:bodyPr>
+          <a:lstStyle/>
+          <a:p>
+            <a:pPr algn="l">
+              <a:lnSpc>
+                <a:spcPts val="1015"/>
+              </a:lnSpc>
+            </a:pPr>
+            <a:r>
+              <a:rPr sz="700" b="0">
+                <a:solidFill>
+                  <a:srgbClr val="12151C"/>
+                </a:solidFill>
+                <a:latin typeface="맑은 고딕"/>
+                <a:ea typeface="맑은 고딕"/>
+              </a:rPr>
+              <a:t>인사 · 총무</a:t>
+            </a:r>
+          </a:p>
+        </p:txBody>
+      </p:sp>
+      <p:cxnSp>
+        <p:nvCxnSpPr>
+          <p:cNvPr id="13" name="Connector 12"/>
+          <p:cNvCxnSpPr/>
+          <p:nvPr/>
+        </p:nvCxnSpPr>
+        <p:spPr>
+          <a:xfrm>
+            <a:off x="252000" y="1015200"/>
+            <a:ext cx="1512000" cy="0"/>
+          </a:xfrm>
+          <a:prstGeom prst="line">
+            <a:avLst/>
+          </a:prstGeom>
+          <a:ln w="3600">
+            <a:solidFill>
+              <a:srgbClr val="E3DAFF"/>
+            </a:solidFill>
+          </a:ln>
+        </p:spPr>
+      </p:cxnSp>
+      <p:sp>
+        <p:nvSpPr>
+          <p:cNvPr id="14" name="텍스트"/>
+          <p:cNvSpPr txBox="1"/>
+          <p:nvPr/>
+        </p:nvSpPr>
+        <p:spPr>
+          <a:xfrm>
+            <a:off x="252000" y="1069200"/>
+            <a:ext cx="216000" cy="95251"/>
+          </a:xfrm>
+          <a:prstGeom prst="rect">
+            <a:avLst/>
+          </a:prstGeom>
+          <a:noFill/>
+        </p:spPr>
+        <p:txBody>
+          <a:bodyPr wrap="square" lIns="0" rIns="0" tIns="0" bIns="0" anchor="t">
+            <a:spAutoFit/>
+          </a:bodyPr>
+          <a:lstStyle/>
+          <a:p>
+            <a:pPr algn="l">
+              <a:lnSpc>
+                <a:spcPts val="725"/>
+              </a:lnSpc>
+            </a:pPr>
+            <a:r>
+              <a:rPr sz="500" b="1" spc="100">
+                <a:solidFill>
+                  <a:srgbClr val="463C72"/>
+                </a:solidFill>
+                <a:latin typeface="맑은 고딕"/>
+                <a:ea typeface="맑은 고딕"/>
+              </a:rPr>
+              <a:t>04</a:t>
+            </a:r>
+          </a:p>
+        </p:txBody>
+      </p:sp>
+      <p:sp>
+        <p:nvSpPr>
+          <p:cNvPr id="15" name="텍스트"/>
+          <p:cNvSpPr txBox="1"/>
+          <p:nvPr/>
+        </p:nvSpPr>
+        <p:spPr>
+          <a:xfrm>
+            <a:off x="489600" y="1058400"/>
+            <a:ext cx="1260000" cy="133351"/>
+          </a:xfrm>
+          <a:prstGeom prst="rect">
+            <a:avLst/>
+          </a:prstGeom>
+          <a:noFill/>
+        </p:spPr>
+        <p:txBody>
+          <a:bodyPr wrap="square" lIns="0" rIns="0" tIns="0" bIns="0" anchor="t">
+            <a:spAutoFit/>
+          </a:bodyPr>
+          <a:lstStyle/>
+          <a:p>
+            <a:pPr algn="l">
+              <a:lnSpc>
+                <a:spcPts val="1015"/>
+              </a:lnSpc>
+            </a:pPr>
+            <a:r>
+              <a:rPr sz="700" b="0">
+                <a:solidFill>
+                  <a:srgbClr val="12151C"/>
+                </a:solidFill>
+                <a:latin typeface="맑은 고딕"/>
+                <a:ea typeface="맑은 고딕"/>
+              </a:rPr>
+              <a:t>품질 관리</a:t>
+            </a:r>
+          </a:p>
+        </p:txBody>
+      </p:sp>
+      <p:cxnSp>
+        <p:nvCxnSpPr>
+          <p:cNvPr id="16" name="Connector 15"/>
+          <p:cNvCxnSpPr/>
+          <p:nvPr/>
+        </p:nvCxnSpPr>
+        <p:spPr>
+          <a:xfrm>
+            <a:off x="252000" y="1202400"/>
+            <a:ext cx="1512000" cy="0"/>
+          </a:xfrm>
+          <a:prstGeom prst="line">
+            <a:avLst/>
+          </a:prstGeom>
+          <a:ln w="3600">
+            <a:solidFill>
+              <a:srgbClr val="E3DAFF"/>
+            </a:solidFill>
+          </a:ln>
+        </p:spPr>
+      </p:cxnSp>
+      <p:sp>
+        <p:nvSpPr>
+          <p:cNvPr id="17" name="Rectangle 16"/>
+          <p:cNvSpPr/>
+          <p:nvPr/>
+        </p:nvSpPr>
+        <p:spPr>
+          <a:xfrm>
+            <a:off x="2088000" y="252000"/>
+            <a:ext cx="900000" cy="1296000"/>
+          </a:xfrm>
+          <a:prstGeom prst="rect">
+            <a:avLst/>
+          </a:prstGeom>
+          <a:solidFill>
+            <a:srgbClr val="9B7BFF"/>
+          </a:solidFill>
+          <a:ln>
+            <a:noFill/>
+          </a:ln>
+        </p:spPr>
+        <p:txBody>
+          <a:bodyPr rtlCol="0" anchor="ctr"/>
+          <a:lstStyle/>
+          <a:p>
+            <a:pPr algn="ctr"/>
+          </a:p>
+        </p:txBody>
+      </p:sp>
+      <p:sp>
+        <p:nvSpPr>
+          <p:cNvPr id="18" name="텍스트"/>
+          <p:cNvSpPr txBox="1"/>
+          <p:nvPr/>
+        </p:nvSpPr>
+        <p:spPr>
+          <a:xfrm>
+            <a:off x="2196000" y="360000"/>
+            <a:ext cx="684000" cy="95251"/>
+          </a:xfrm>
+          <a:prstGeom prst="rect">
+            <a:avLst/>
+          </a:prstGeom>
+          <a:noFill/>
+        </p:spPr>
+        <p:txBody>
+          <a:bodyPr wrap="square" lIns="0" rIns="0" tIns="0" bIns="0" anchor="t">
+            <a:spAutoFit/>
+          </a:bodyPr>
+          <a:lstStyle/>
+          <a:p>
+            <a:pPr algn="l">
+              <a:lnSpc>
+                <a:spcPts val="725"/>
+              </a:lnSpc>
+            </a:pPr>
+            <a:r>
+              <a:rPr sz="500" b="1" spc="240">
+                <a:solidFill>
+                  <a:srgbClr val="12151C">
+                    <a:alpha val="75000"/>
+                  </a:srgbClr>
+                </a:solidFill>
+                <a:latin typeface="맑은 고딕"/>
+                <a:ea typeface="맑은 고딕"/>
+              </a:rPr>
+              <a:t>INFO</a:t>
+            </a:r>
+          </a:p>
+        </p:txBody>
+      </p:sp>
+      <p:sp>
+        <p:nvSpPr>
+          <p:cNvPr id="19" name="텍스트"/>
+          <p:cNvSpPr txBox="1"/>
+          <p:nvPr/>
+        </p:nvSpPr>
+        <p:spPr>
+          <a:xfrm>
+            <a:off x="2196000" y="504000"/>
+            <a:ext cx="684000" cy="121921"/>
+          </a:xfrm>
+          <a:prstGeom prst="rect">
+            <a:avLst/>
+          </a:prstGeom>
+          <a:noFill/>
+        </p:spPr>
+        <p:txBody>
+          <a:bodyPr wrap="square" lIns="0" rIns="0" tIns="0" bIns="0" anchor="t">
+            <a:spAutoFit/>
+          </a:bodyPr>
+          <a:lstStyle/>
+          <a:p>
+            <a:pPr algn="l">
+              <a:lnSpc>
+                <a:spcPts val="927"/>
+              </a:lnSpc>
+            </a:pPr>
+            <a:r>
+              <a:rPr sz="640" b="1">
+                <a:solidFill>
+                  <a:srgbClr val="12151C"/>
+                </a:solidFill>
+                <a:latin typeface="맑은 고딕"/>
+                <a:ea typeface="맑은 고딕"/>
+              </a:rPr>
+              <a:t>평일 10:00 – 19:00</a:t>
+            </a:r>
+          </a:p>
+        </p:txBody>
+      </p:sp>
+      <p:cxnSp>
+        <p:nvCxnSpPr>
+          <p:cNvPr id="20" name="Connector 19"/>
+          <p:cNvCxnSpPr/>
+          <p:nvPr/>
+        </p:nvCxnSpPr>
+        <p:spPr>
+          <a:xfrm>
+            <a:off x="2196000" y="770400"/>
+            <a:ext cx="684000" cy="0"/>
+          </a:xfrm>
+          <a:prstGeom prst="line">
+            <a:avLst/>
+          </a:prstGeom>
+          <a:ln w="3600">
+            <a:solidFill>
+              <a:srgbClr val="12151C"/>
+            </a:solidFill>
+          </a:ln>
+        </p:spPr>
+      </p:cxnSp>
+      <p:sp>
+        <p:nvSpPr>
+          <p:cNvPr id="21" name="텍스트"/>
+          <p:cNvSpPr txBox="1"/>
+          <p:nvPr/>
+        </p:nvSpPr>
+        <p:spPr>
+          <a:xfrm>
+            <a:off x="2196000" y="849600"/>
+            <a:ext cx="684000" cy="91441"/>
+          </a:xfrm>
+          <a:prstGeom prst="rect">
+            <a:avLst/>
+          </a:prstGeom>
+          <a:noFill/>
+        </p:spPr>
+        <p:txBody>
+          <a:bodyPr wrap="square" lIns="0" rIns="0" tIns="0" bIns="0" anchor="t">
+            <a:spAutoFit/>
+          </a:bodyPr>
+          <a:lstStyle/>
+          <a:p>
+            <a:pPr algn="l">
+              <a:lnSpc>
+                <a:spcPts val="696"/>
+              </a:lnSpc>
+            </a:pPr>
+            <a:r>
+              <a:rPr sz="480" b="1" spc="140">
+                <a:solidFill>
+                  <a:srgbClr val="12151C">
+                    <a:alpha val="75000"/>
+                  </a:srgbClr>
+                </a:solidFill>
+                <a:latin typeface="맑은 고딕"/>
+                <a:ea typeface="맑은 고딕"/>
+              </a:rPr>
+              <a:t>INSTAGRAM</a:t>
+            </a:r>
+          </a:p>
+        </p:txBody>
+      </p:sp>
+      <p:sp>
+        <p:nvSpPr>
+          <p:cNvPr id="22" name="텍스트"/>
+          <p:cNvSpPr txBox="1"/>
+          <p:nvPr/>
+        </p:nvSpPr>
+        <p:spPr>
+          <a:xfrm>
+            <a:off x="2196000" y="957600"/>
+            <a:ext cx="684000" cy="121921"/>
+          </a:xfrm>
+          <a:prstGeom prst="rect">
+            <a:avLst/>
+          </a:prstGeom>
+          <a:noFill/>
+        </p:spPr>
+        <p:txBody>
+          <a:bodyPr wrap="square" lIns="0" rIns="0" tIns="0" bIns="0" anchor="t">
+            <a:spAutoFit/>
+          </a:bodyPr>
+          <a:lstStyle/>
+          <a:p>
+            <a:pPr algn="l">
+              <a:lnSpc>
+                <a:spcPts val="927"/>
+              </a:lnSpc>
+            </a:pPr>
+            <a:r>
+              <a:rPr sz="640" b="1">
+                <a:solidFill>
+                  <a:srgbClr val="12151C"/>
+                </a:solidFill>
+                <a:latin typeface="맑은 고딕"/>
+                <a:ea typeface="맑은 고딕"/>
+              </a:rPr>
+              <a:t>@아이디</a:t>
+            </a:r>
+          </a:p>
+        </p:txBody>
+      </p:sp>
+      <p:sp>
+        <p:nvSpPr>
+          <p:cNvPr id="23" name="텍스트"/>
+          <p:cNvSpPr txBox="1"/>
+          <p:nvPr/>
+        </p:nvSpPr>
+        <p:spPr>
+          <a:xfrm>
+            <a:off x="2196000" y="1368000"/>
+            <a:ext cx="720000" cy="106681"/>
+          </a:xfrm>
+          <a:prstGeom prst="rect">
+            <a:avLst/>
+          </a:prstGeom>
+          <a:noFill/>
+        </p:spPr>
+        <p:txBody>
+          <a:bodyPr wrap="square" lIns="0" rIns="0" tIns="0" bIns="0" anchor="t">
+            <a:spAutoFit/>
+          </a:bodyPr>
+          <a:lstStyle/>
+          <a:p>
+            <a:pPr algn="l">
+              <a:lnSpc>
+                <a:spcPts val="811"/>
+              </a:lnSpc>
+            </a:pPr>
+            <a:r>
+              <a:rPr sz="560" b="1" spc="80">
                 <a:solidFill>
                   <a:srgbClr val="12151C"/>
                 </a:solidFill>
